--- a/Aula06_Decomposicao/Aula06_Teoria.pptx
+++ b/Aula06_Decomposicao/Aula06_Teoria.pptx
@@ -2320,6 +2320,10 @@
           </a:solidFill>
           <a:ln/>
         </p:spPr>
+        <p:txBody>
+          <a:bodyPr/>
+          <a:p/>
+        </p:txBody>
       </p:sp>
       <p:sp>
         <p:nvSpPr>
@@ -2342,6 +2346,10 @@
           </a:solidFill>
           <a:ln/>
         </p:spPr>
+        <p:txBody>
+          <a:bodyPr/>
+          <a:p/>
+        </p:txBody>
       </p:sp>
       <p:sp>
         <p:nvSpPr>
@@ -2362,6 +2370,10 @@
           </a:solidFill>
           <a:ln/>
         </p:spPr>
+        <p:txBody>
+          <a:bodyPr/>
+          <a:p/>
+        </p:txBody>
       </p:sp>
       <p:pic>
         <p:nvPicPr>
@@ -2633,6 +2645,10 @@
           </a:solidFill>
           <a:ln/>
         </p:spPr>
+        <p:txBody>
+          <a:bodyPr/>
+          <a:p/>
+        </p:txBody>
       </p:sp>
       <p:sp>
         <p:nvSpPr>
@@ -2733,6 +2749,10 @@
           </a:solidFill>
           <a:ln/>
         </p:spPr>
+        <p:txBody>
+          <a:bodyPr/>
+          <a:p/>
+        </p:txBody>
       </p:sp>
       <p:sp>
         <p:nvSpPr>
@@ -2900,6 +2920,10 @@
           </a:solidFill>
           <a:ln/>
         </p:spPr>
+        <p:txBody>
+          <a:bodyPr/>
+          <a:p/>
+        </p:txBody>
       </p:sp>
       <p:sp>
         <p:nvSpPr>
@@ -3517,6 +3541,10 @@
           </a:solidFill>
           <a:ln/>
         </p:spPr>
+        <p:txBody>
+          <a:bodyPr/>
+          <a:p/>
+        </p:txBody>
       </p:sp>
       <p:sp>
         <p:nvSpPr>
@@ -3615,7 +3643,7 @@
                 <a:ea typeface="Calibri" pitchFamily="34" charset="-122"/>
                 <a:cs typeface="Calibri" pitchFamily="34" charset="-120"/>
               </a:rPr>
-              <a:t>Relato: explicitar variáveis, relações e restrições.</a:t>
+              <a:t>Explicitar variáveis, relações e restrições.</a:t>
             </a:r>
             <a:endParaRPr lang="en-US" sz="1250" dirty="0"/>
           </a:p>
@@ -3636,7 +3664,7 @@
                 <a:ea typeface="Calibri" pitchFamily="34" charset="-122"/>
                 <a:cs typeface="Calibri" pitchFamily="34" charset="-120"/>
               </a:rPr>
-              <a:t>Queiroz: representações ampliam a percepção de propriedades e relações.</a:t>
+              <a:t>Representações ampliam a percepção de propriedades e relações.</a:t>
             </a:r>
             <a:endParaRPr lang="en-US" sz="1250" dirty="0"/>
           </a:p>
@@ -3657,7 +3685,7 @@
                 <a:ea typeface="Calibri" pitchFamily="34" charset="-122"/>
                 <a:cs typeface="Calibri" pitchFamily="34" charset="-120"/>
               </a:rPr>
-              <a:t>Wessels: listas, tabelas e gráficos comunicam histórias diferentes dos dados.</a:t>
+              <a:t>Listas, tabelas e gráficos comunicam histórias diferentes dos dados.</a:t>
             </a:r>
             <a:endParaRPr lang="en-US" sz="1250" dirty="0"/>
           </a:p>
@@ -3684,6 +3712,10 @@
           </a:solidFill>
           <a:ln/>
         </p:spPr>
+        <p:txBody>
+          <a:bodyPr/>
+          <a:p/>
+        </p:txBody>
       </p:sp>
       <p:sp>
         <p:nvSpPr>
@@ -3951,6 +3983,10 @@
           </a:solidFill>
           <a:ln/>
         </p:spPr>
+        <p:txBody>
+          <a:bodyPr/>
+          <a:p/>
+        </p:txBody>
       </p:sp>
       <p:sp>
         <p:nvSpPr>
@@ -4051,6 +4087,10 @@
           </a:solidFill>
           <a:ln/>
         </p:spPr>
+        <p:txBody>
+          <a:bodyPr/>
+          <a:p/>
+        </p:txBody>
       </p:sp>
       <p:sp>
         <p:nvSpPr>
@@ -4197,6 +4237,10 @@
           </a:solidFill>
           <a:ln/>
         </p:spPr>
+        <p:txBody>
+          <a:bodyPr/>
+          <a:p/>
+        </p:txBody>
       </p:sp>
       <p:sp>
         <p:nvSpPr>
@@ -5046,6 +5090,10 @@
           </a:solidFill>
           <a:ln/>
         </p:spPr>
+        <p:txBody>
+          <a:bodyPr/>
+          <a:p/>
+        </p:txBody>
       </p:sp>
       <p:sp>
         <p:nvSpPr>
@@ -5144,7 +5192,7 @@
                 <a:ea typeface="Calibri" pitchFamily="34" charset="-122"/>
                 <a:cs typeface="Calibri" pitchFamily="34" charset="-120"/>
               </a:rPr>
-              <a:t>Relato: avaliar o percurso de pensamento, não apenas o código final.</a:t>
+              <a:t>Avaliar o percurso de pensamento, não apenas o código final.</a:t>
             </a:r>
             <a:endParaRPr lang="en-US" sz="1250" dirty="0"/>
           </a:p>
@@ -5165,7 +5213,7 @@
                 <a:ea typeface="Calibri" pitchFamily="34" charset="-122"/>
                 <a:cs typeface="Calibri" pitchFamily="34" charset="-120"/>
               </a:rPr>
-              <a:t>Queiroz: o resultado final não esgota a aprendizagem do conceito.</a:t>
+              <a:t>O resultado final não esgota a aprendizagem do conceito.</a:t>
             </a:r>
             <a:endParaRPr lang="en-US" sz="1250" dirty="0"/>
           </a:p>
@@ -5186,7 +5234,7 @@
                 <a:ea typeface="Calibri" pitchFamily="34" charset="-122"/>
                 <a:cs typeface="Calibri" pitchFamily="34" charset="-120"/>
               </a:rPr>
-              <a:t>Wessels: múltiplas representações indicam modelagem mais bem-sucedida.</a:t>
+              <a:t>Múltiplas representações indicam modelagem mais bem-sucedida.</a:t>
             </a:r>
             <a:endParaRPr lang="en-US" sz="1250" dirty="0"/>
           </a:p>
@@ -5213,6 +5261,10 @@
           </a:solidFill>
           <a:ln/>
         </p:spPr>
+        <p:txBody>
+          <a:bodyPr/>
+          <a:p/>
+        </p:txBody>
       </p:sp>
       <p:sp>
         <p:nvSpPr>
@@ -5480,6 +5532,10 @@
           </a:solidFill>
           <a:ln/>
         </p:spPr>
+        <p:txBody>
+          <a:bodyPr/>
+          <a:p/>
+        </p:txBody>
       </p:sp>
       <p:sp>
         <p:nvSpPr>
@@ -5580,6 +5636,10 @@
           </a:solidFill>
           <a:ln/>
         </p:spPr>
+        <p:txBody>
+          <a:bodyPr/>
+          <a:p/>
+        </p:txBody>
       </p:sp>
       <p:sp>
         <p:nvSpPr>
@@ -5726,6 +5786,10 @@
           </a:solidFill>
           <a:ln/>
         </p:spPr>
+        <p:txBody>
+          <a:bodyPr/>
+          <a:p/>
+        </p:txBody>
       </p:sp>
       <p:sp>
         <p:nvSpPr>
@@ -6643,6 +6707,10 @@
           </a:solidFill>
           <a:ln/>
         </p:spPr>
+        <p:txBody>
+          <a:bodyPr/>
+          <a:p/>
+        </p:txBody>
       </p:sp>
       <p:sp>
         <p:nvSpPr>
@@ -6741,7 +6809,7 @@
                 <a:ea typeface="Calibri" pitchFamily="34" charset="-122"/>
                 <a:cs typeface="Calibri" pitchFamily="34" charset="-120"/>
               </a:rPr>
-              <a:t>Wessels: organizar dados é componente crítico da representação.</a:t>
+              <a:t>Organizar dados é componente crítico da representação.</a:t>
             </a:r>
             <a:endParaRPr lang="en-US" sz="1250" dirty="0"/>
           </a:p>
@@ -6762,7 +6830,7 @@
                 <a:ea typeface="Calibri" pitchFamily="34" charset="-122"/>
                 <a:cs typeface="Calibri" pitchFamily="34" charset="-120"/>
               </a:rPr>
-              <a:t>Queiroz: a forma de representação influencia erros, antecipações e reorganizações.</a:t>
+              <a:t>A forma de representação influencia erros, antecipações e reorganizações.</a:t>
             </a:r>
             <a:endParaRPr lang="en-US" sz="1250" dirty="0"/>
           </a:p>
@@ -6783,7 +6851,7 @@
                 <a:ea typeface="Calibri" pitchFamily="34" charset="-122"/>
                 <a:cs typeface="Calibri" pitchFamily="34" charset="-120"/>
               </a:rPr>
-              <a:t>Relato: articular código, texto, tabela, gráfico e interpretação.</a:t>
+              <a:t>Articular código, texto, tabela, gráfico e interpretação.</a:t>
             </a:r>
             <a:endParaRPr lang="en-US" sz="1250" dirty="0"/>
           </a:p>
@@ -6810,6 +6878,10 @@
           </a:solidFill>
           <a:ln/>
         </p:spPr>
+        <p:txBody>
+          <a:bodyPr/>
+          <a:p/>
+        </p:txBody>
       </p:sp>
       <p:sp>
         <p:nvSpPr>
@@ -7077,6 +7149,10 @@
           </a:solidFill>
           <a:ln/>
         </p:spPr>
+        <p:txBody>
+          <a:bodyPr/>
+          <a:p/>
+        </p:txBody>
       </p:sp>
       <p:sp>
         <p:nvSpPr>
@@ -7177,6 +7253,10 @@
           </a:solidFill>
           <a:ln/>
         </p:spPr>
+        <p:txBody>
+          <a:bodyPr/>
+          <a:p/>
+        </p:txBody>
       </p:sp>
       <p:sp>
         <p:nvSpPr>
@@ -7344,6 +7424,10 @@
           </a:solidFill>
           <a:ln/>
         </p:spPr>
+        <p:txBody>
+          <a:bodyPr/>
+          <a:p/>
+        </p:txBody>
       </p:sp>
       <p:sp>
         <p:nvSpPr>
@@ -7921,6 +8005,10 @@
           </a:solidFill>
           <a:ln/>
         </p:spPr>
+        <p:txBody>
+          <a:bodyPr/>
+          <a:p/>
+        </p:txBody>
       </p:sp>
       <p:sp>
         <p:nvSpPr>
@@ -8019,7 +8107,7 @@
                 <a:ea typeface="Calibri" pitchFamily="34" charset="-122"/>
                 <a:cs typeface="Calibri" pitchFamily="34" charset="-120"/>
               </a:rPr>
-              <a:t>Queiroz: a forma de representação influencia erros, antecipações e reorganizações.</a:t>
+              <a:t>A forma de representação influencia erros, antecipações e reorganizações.</a:t>
             </a:r>
             <a:endParaRPr lang="en-US" sz="1250" dirty="0"/>
           </a:p>
@@ -8040,7 +8128,7 @@
                 <a:ea typeface="Calibri" pitchFamily="34" charset="-122"/>
                 <a:cs typeface="Calibri" pitchFamily="34" charset="-120"/>
               </a:rPr>
-              <a:t>Relato: incluir revisão, depuração e reconstrução.</a:t>
+              <a:t>Incluir revisão, depuração e reconstrução.</a:t>
             </a:r>
             <a:endParaRPr lang="en-US" sz="1250" dirty="0"/>
           </a:p>
@@ -8061,7 +8149,7 @@
                 <a:ea typeface="Calibri" pitchFamily="34" charset="-122"/>
                 <a:cs typeface="Calibri" pitchFamily="34" charset="-120"/>
               </a:rPr>
-              <a:t>Wessels: respostas idiossincráticas também revelam modos de pensar.</a:t>
+              <a:t>Respostas idiossincráticas também revelam modos de pensar.</a:t>
             </a:r>
             <a:endParaRPr lang="en-US" sz="1250" dirty="0"/>
           </a:p>
@@ -8088,6 +8176,10 @@
           </a:solidFill>
           <a:ln/>
         </p:spPr>
+        <p:txBody>
+          <a:bodyPr/>
+          <a:p/>
+        </p:txBody>
       </p:sp>
       <p:sp>
         <p:nvSpPr>
@@ -8355,6 +8447,10 @@
           </a:solidFill>
           <a:ln/>
         </p:spPr>
+        <p:txBody>
+          <a:bodyPr/>
+          <a:p/>
+        </p:txBody>
       </p:sp>
       <p:sp>
         <p:nvSpPr>
@@ -8455,6 +8551,10 @@
           </a:solidFill>
           <a:ln/>
         </p:spPr>
+        <p:txBody>
+          <a:bodyPr/>
+          <a:p/>
+        </p:txBody>
       </p:sp>
       <p:sp>
         <p:nvSpPr>
@@ -8601,6 +8701,10 @@
           </a:solidFill>
           <a:ln/>
         </p:spPr>
+        <p:txBody>
+          <a:bodyPr/>
+          <a:p/>
+        </p:txBody>
       </p:sp>
       <p:sp>
         <p:nvSpPr>
@@ -9013,6 +9117,10 @@
           </a:solidFill>
           <a:ln/>
         </p:spPr>
+        <p:txBody>
+          <a:bodyPr/>
+          <a:p/>
+        </p:txBody>
       </p:sp>
       <p:sp>
         <p:nvSpPr>
@@ -9111,7 +9219,7 @@
                 <a:ea typeface="Calibri" pitchFamily="34" charset="-122"/>
                 <a:cs typeface="Calibri" pitchFamily="34" charset="-120"/>
               </a:rPr>
-              <a:t>Relato: avaliar o percurso de pensamento, não apenas o código final.</a:t>
+              <a:t>Avaliar o percurso de pensamento, não apenas o código final.</a:t>
             </a:r>
             <a:endParaRPr lang="en-US" sz="1250" dirty="0"/>
           </a:p>
@@ -9132,7 +9240,7 @@
                 <a:ea typeface="Calibri" pitchFamily="34" charset="-122"/>
                 <a:cs typeface="Calibri" pitchFamily="34" charset="-120"/>
               </a:rPr>
-              <a:t>Queiroz: o percurso da tarefa revela mudanças no discurso e na ação.</a:t>
+              <a:t>O percurso da tarefa revela mudanças no discurso e na ação.</a:t>
             </a:r>
             <a:endParaRPr lang="en-US" sz="1250" dirty="0"/>
           </a:p>
@@ -9153,7 +9261,7 @@
                 <a:ea typeface="Calibri" pitchFamily="34" charset="-122"/>
                 <a:cs typeface="Calibri" pitchFamily="34" charset="-120"/>
               </a:rPr>
-              <a:t>Wessels: níveis SOLO ajudam a observar respostas de menor a maior integração.</a:t>
+              <a:t>Níveis SOLO ajudam a observar respostas de menor a maior integração.</a:t>
             </a:r>
             <a:endParaRPr lang="en-US" sz="1250" dirty="0"/>
           </a:p>
@@ -9180,6 +9288,10 @@
           </a:solidFill>
           <a:ln/>
         </p:spPr>
+        <p:txBody>
+          <a:bodyPr/>
+          <a:p/>
+        </p:txBody>
       </p:sp>
       <p:sp>
         <p:nvSpPr>
@@ -9447,6 +9559,10 @@
           </a:solidFill>
           <a:ln/>
         </p:spPr>
+        <p:txBody>
+          <a:bodyPr/>
+          <a:p/>
+        </p:txBody>
       </p:sp>
       <p:sp>
         <p:nvSpPr>
@@ -9547,6 +9663,10 @@
           </a:solidFill>
           <a:ln/>
         </p:spPr>
+        <p:txBody>
+          <a:bodyPr/>
+          <a:p/>
+        </p:txBody>
       </p:sp>
       <p:sp>
         <p:nvSpPr>
@@ -9693,6 +9813,10 @@
           </a:solidFill>
           <a:ln/>
         </p:spPr>
+        <p:txBody>
+          <a:bodyPr/>
+          <a:p/>
+        </p:txBody>
       </p:sp>
       <p:sp>
         <p:nvSpPr>
@@ -10173,6 +10297,10 @@
           </a:solidFill>
           <a:ln/>
         </p:spPr>
+        <p:txBody>
+          <a:bodyPr/>
+          <a:p/>
+        </p:txBody>
       </p:sp>
       <p:sp>
         <p:nvSpPr>
@@ -10271,7 +10399,7 @@
                 <a:ea typeface="Calibri" pitchFamily="34" charset="-122"/>
                 <a:cs typeface="Calibri" pitchFamily="34" charset="-120"/>
               </a:rPr>
-              <a:t>Relato: orientar adaptação para diferentes contextos educacionais.</a:t>
+              <a:t>Orientar adaptação para diferentes contextos educacionais.</a:t>
             </a:r>
             <a:endParaRPr lang="en-US" sz="1250" dirty="0"/>
           </a:p>
@@ -10292,7 +10420,7 @@
                 <a:ea typeface="Calibri" pitchFamily="34" charset="-122"/>
                 <a:cs typeface="Calibri" pitchFamily="34" charset="-120"/>
               </a:rPr>
-              <a:t>Queiroz: a interação consciente com a forma favorece reflexão conceitual.</a:t>
+              <a:t>A interação consciente com a forma favorece reflexão conceitual.</a:t>
             </a:r>
             <a:endParaRPr lang="en-US" sz="1250" dirty="0"/>
           </a:p>
@@ -10313,7 +10441,7 @@
                 <a:ea typeface="Calibri" pitchFamily="34" charset="-122"/>
                 <a:cs typeface="Calibri" pitchFamily="34" charset="-120"/>
               </a:rPr>
-              <a:t>Wessels: atividades planejadas desenvolvem representação e pensamento de ordem superior.</a:t>
+              <a:t>Atividades planejadas desenvolvem representação e pensamento de ordem superior.</a:t>
             </a:r>
             <a:endParaRPr lang="en-US" sz="1250" dirty="0"/>
           </a:p>
@@ -10340,6 +10468,10 @@
           </a:solidFill>
           <a:ln/>
         </p:spPr>
+        <p:txBody>
+          <a:bodyPr/>
+          <a:p/>
+        </p:txBody>
       </p:sp>
       <p:sp>
         <p:nvSpPr>
@@ -10607,6 +10739,10 @@
           </a:solidFill>
           <a:ln/>
         </p:spPr>
+        <p:txBody>
+          <a:bodyPr/>
+          <a:p/>
+        </p:txBody>
       </p:sp>
       <p:sp>
         <p:nvSpPr>
@@ -10707,6 +10843,10 @@
           </a:solidFill>
           <a:ln/>
         </p:spPr>
+        <p:txBody>
+          <a:bodyPr/>
+          <a:p/>
+        </p:txBody>
       </p:sp>
       <p:sp>
         <p:nvSpPr>
@@ -10853,6 +10993,10 @@
           </a:solidFill>
           <a:ln/>
         </p:spPr>
+        <p:txBody>
+          <a:bodyPr/>
+          <a:p/>
+        </p:txBody>
       </p:sp>
       <p:sp>
         <p:nvSpPr>
@@ -11163,6 +11307,10 @@
           </a:solidFill>
           <a:ln/>
         </p:spPr>
+        <p:txBody>
+          <a:bodyPr/>
+          <a:p/>
+        </p:txBody>
       </p:sp>
       <p:sp>
         <p:nvSpPr>
@@ -11261,7 +11409,7 @@
                 <a:ea typeface="Calibri" pitchFamily="34" charset="-122"/>
                 <a:cs typeface="Calibri" pitchFamily="34" charset="-120"/>
               </a:rPr>
-              <a:t>Wessels: níveis SOLO ajudam a observar respostas de menor a maior integração.</a:t>
+              <a:t>Níveis SOLO ajudam a observar respostas de menor a maior integração.</a:t>
             </a:r>
             <a:endParaRPr lang="en-US" sz="1250" dirty="0"/>
           </a:p>
@@ -11282,7 +11430,7 @@
                 <a:ea typeface="Calibri" pitchFamily="34" charset="-122"/>
                 <a:cs typeface="Calibri" pitchFamily="34" charset="-120"/>
               </a:rPr>
-              <a:t>Queiroz: a análise qualitativa observa invariantes e relações mobilizadas na ação.</a:t>
+              <a:t>A análise qualitativa observa invariantes e relações mobilizadas na ação.</a:t>
             </a:r>
             <a:endParaRPr lang="en-US" sz="1250" dirty="0"/>
           </a:p>
@@ -11303,7 +11451,7 @@
                 <a:ea typeface="Calibri" pitchFamily="34" charset="-122"/>
                 <a:cs typeface="Calibri" pitchFamily="34" charset="-120"/>
               </a:rPr>
-              <a:t>Relato: avaliar o percurso de pensamento, não apenas o código final.</a:t>
+              <a:t>Avaliar o percurso de pensamento, não apenas o código final.</a:t>
             </a:r>
             <a:endParaRPr lang="en-US" sz="1250" dirty="0"/>
           </a:p>
@@ -11330,6 +11478,10 @@
           </a:solidFill>
           <a:ln/>
         </p:spPr>
+        <p:txBody>
+          <a:bodyPr/>
+          <a:p/>
+        </p:txBody>
       </p:sp>
       <p:sp>
         <p:nvSpPr>
@@ -11638,6 +11790,10 @@
           </a:solidFill>
           <a:ln/>
         </p:spPr>
+        <p:txBody>
+          <a:bodyPr/>
+          <a:p/>
+        </p:txBody>
       </p:sp>
       <p:sp>
         <p:nvSpPr>
@@ -11745,6 +11901,10 @@
           </a:solidFill>
           <a:ln/>
         </p:spPr>
+        <p:txBody>
+          <a:bodyPr/>
+          <a:p/>
+        </p:txBody>
       </p:sp>
       <p:sp>
         <p:nvSpPr>
@@ -11765,6 +11925,10 @@
           </a:solidFill>
           <a:ln/>
         </p:spPr>
+        <p:txBody>
+          <a:bodyPr/>
+          <a:p/>
+        </p:txBody>
       </p:sp>
       <p:pic>
         <p:nvPicPr>
@@ -12077,6 +12241,10 @@
           </a:solidFill>
           <a:ln/>
         </p:spPr>
+        <p:txBody>
+          <a:bodyPr/>
+          <a:p/>
+        </p:txBody>
       </p:sp>
       <p:sp>
         <p:nvSpPr>
@@ -12097,6 +12265,10 @@
           </a:solidFill>
           <a:ln/>
         </p:spPr>
+        <p:txBody>
+          <a:bodyPr/>
+          <a:p/>
+        </p:txBody>
       </p:sp>
       <p:sp>
         <p:nvSpPr>
@@ -12200,6 +12372,10 @@
           </a:solidFill>
           <a:ln/>
         </p:spPr>
+        <p:txBody>
+          <a:bodyPr/>
+          <a:p/>
+        </p:txBody>
       </p:sp>
       <p:sp>
         <p:nvSpPr>
@@ -12220,6 +12396,10 @@
           </a:solidFill>
           <a:ln/>
         </p:spPr>
+        <p:txBody>
+          <a:bodyPr/>
+          <a:p/>
+        </p:txBody>
       </p:sp>
       <p:sp>
         <p:nvSpPr>
@@ -12323,6 +12503,10 @@
           </a:solidFill>
           <a:ln/>
         </p:spPr>
+        <p:txBody>
+          <a:bodyPr/>
+          <a:p/>
+        </p:txBody>
       </p:sp>
       <p:sp>
         <p:nvSpPr>
@@ -12343,6 +12527,10 @@
           </a:solidFill>
           <a:ln/>
         </p:spPr>
+        <p:txBody>
+          <a:bodyPr/>
+          <a:p/>
+        </p:txBody>
       </p:sp>
       <p:sp>
         <p:nvSpPr>
@@ -12446,6 +12634,10 @@
           </a:solidFill>
           <a:ln/>
         </p:spPr>
+        <p:txBody>
+          <a:bodyPr/>
+          <a:p/>
+        </p:txBody>
       </p:sp>
       <p:sp>
         <p:nvSpPr>
@@ -12466,6 +12658,10 @@
           </a:solidFill>
           <a:ln/>
         </p:spPr>
+        <p:txBody>
+          <a:bodyPr/>
+          <a:p/>
+        </p:txBody>
       </p:sp>
       <p:sp>
         <p:nvSpPr>
@@ -12569,6 +12765,10 @@
           </a:solidFill>
           <a:ln/>
         </p:spPr>
+        <p:txBody>
+          <a:bodyPr/>
+          <a:p/>
+        </p:txBody>
       </p:sp>
       <p:sp>
         <p:nvSpPr>
@@ -12589,6 +12789,10 @@
           </a:solidFill>
           <a:ln/>
         </p:spPr>
+        <p:txBody>
+          <a:bodyPr/>
+          <a:p/>
+        </p:txBody>
       </p:sp>
       <p:sp>
         <p:nvSpPr>
@@ -12692,6 +12896,10 @@
           </a:solidFill>
           <a:ln/>
         </p:spPr>
+        <p:txBody>
+          <a:bodyPr/>
+          <a:p/>
+        </p:txBody>
       </p:sp>
       <p:sp>
         <p:nvSpPr>
@@ -12712,6 +12920,10 @@
           </a:solidFill>
           <a:ln/>
         </p:spPr>
+        <p:txBody>
+          <a:bodyPr/>
+          <a:p/>
+        </p:txBody>
       </p:sp>
       <p:sp>
         <p:nvSpPr>
@@ -13042,6 +13254,10 @@
           </a:solidFill>
           <a:ln/>
         </p:spPr>
+        <p:txBody>
+          <a:bodyPr/>
+          <a:p/>
+        </p:txBody>
       </p:sp>
       <p:sp>
         <p:nvSpPr>
@@ -13062,6 +13278,10 @@
           </a:solidFill>
           <a:ln/>
         </p:spPr>
+        <p:txBody>
+          <a:bodyPr/>
+          <a:p/>
+        </p:txBody>
       </p:sp>
       <p:sp>
         <p:nvSpPr>
@@ -13226,6 +13446,10 @@
           </a:solidFill>
           <a:ln/>
         </p:spPr>
+        <p:txBody>
+          <a:bodyPr/>
+          <a:p/>
+        </p:txBody>
       </p:sp>
       <p:sp>
         <p:nvSpPr>
@@ -13246,6 +13470,10 @@
           </a:solidFill>
           <a:ln/>
         </p:spPr>
+        <p:txBody>
+          <a:bodyPr/>
+          <a:p/>
+        </p:txBody>
       </p:sp>
       <p:sp>
         <p:nvSpPr>
@@ -13410,6 +13638,10 @@
           </a:solidFill>
           <a:ln/>
         </p:spPr>
+        <p:txBody>
+          <a:bodyPr/>
+          <a:p/>
+        </p:txBody>
       </p:sp>
       <p:sp>
         <p:nvSpPr>
@@ -13659,6 +13891,10 @@
           </a:solidFill>
           <a:ln/>
         </p:spPr>
+        <p:txBody>
+          <a:bodyPr/>
+          <a:p/>
+        </p:txBody>
       </p:sp>
       <p:sp>
         <p:nvSpPr>
@@ -13679,6 +13915,10 @@
           </a:solidFill>
           <a:ln/>
         </p:spPr>
+        <p:txBody>
+          <a:bodyPr/>
+          <a:p/>
+        </p:txBody>
       </p:sp>
       <p:sp>
         <p:nvSpPr>
@@ -13843,6 +14083,10 @@
           </a:solidFill>
           <a:ln/>
         </p:spPr>
+        <p:txBody>
+          <a:bodyPr/>
+          <a:p/>
+        </p:txBody>
       </p:sp>
       <p:sp>
         <p:nvSpPr>
@@ -13863,6 +14107,10 @@
           </a:solidFill>
           <a:ln/>
         </p:spPr>
+        <p:txBody>
+          <a:bodyPr/>
+          <a:p/>
+        </p:txBody>
       </p:sp>
       <p:sp>
         <p:nvSpPr>
@@ -14027,6 +14275,10 @@
           </a:solidFill>
           <a:ln/>
         </p:spPr>
+        <p:txBody>
+          <a:bodyPr/>
+          <a:p/>
+        </p:txBody>
       </p:sp>
       <p:sp>
         <p:nvSpPr>
@@ -14276,6 +14528,10 @@
           </a:solidFill>
           <a:ln/>
         </p:spPr>
+        <p:txBody>
+          <a:bodyPr/>
+          <a:p/>
+        </p:txBody>
       </p:sp>
       <p:sp>
         <p:nvSpPr>
@@ -14296,6 +14552,10 @@
           </a:solidFill>
           <a:ln/>
         </p:spPr>
+        <p:txBody>
+          <a:bodyPr/>
+          <a:p/>
+        </p:txBody>
       </p:sp>
       <p:sp>
         <p:nvSpPr>
@@ -14513,6 +14773,10 @@
           </a:solidFill>
           <a:ln/>
         </p:spPr>
+        <p:txBody>
+          <a:bodyPr/>
+          <a:p/>
+        </p:txBody>
       </p:sp>
       <p:sp>
         <p:nvSpPr>
@@ -14533,6 +14797,10 @@
           </a:solidFill>
           <a:ln/>
         </p:spPr>
+        <p:txBody>
+          <a:bodyPr/>
+          <a:p/>
+        </p:txBody>
       </p:sp>
       <p:sp>
         <p:nvSpPr>
@@ -14858,6 +15126,10 @@
           </a:solidFill>
           <a:ln/>
         </p:spPr>
+        <p:txBody>
+          <a:bodyPr/>
+          <a:p/>
+        </p:txBody>
       </p:sp>
       <p:sp>
         <p:nvSpPr>
@@ -14997,6 +15269,10 @@
           </a:solidFill>
           <a:ln/>
         </p:spPr>
+        <p:txBody>
+          <a:bodyPr/>
+          <a:p/>
+        </p:txBody>
       </p:sp>
       <p:sp>
         <p:nvSpPr>
@@ -15361,6 +15637,10 @@
           </a:solidFill>
           <a:ln/>
         </p:spPr>
+        <p:txBody>
+          <a:bodyPr/>
+          <a:p/>
+        </p:txBody>
       </p:sp>
       <p:sp>
         <p:nvSpPr>
@@ -15461,6 +15741,10 @@
           </a:solidFill>
           <a:ln/>
         </p:spPr>
+        <p:txBody>
+          <a:bodyPr/>
+          <a:p/>
+        </p:txBody>
       </p:sp>
       <p:sp>
         <p:nvSpPr>
@@ -15607,6 +15891,10 @@
           </a:solidFill>
           <a:ln/>
         </p:spPr>
+        <p:txBody>
+          <a:bodyPr/>
+          <a:p/>
+        </p:txBody>
       </p:sp>
       <p:sp>
         <p:nvSpPr>
@@ -15968,6 +16256,10 @@
           </a:solidFill>
           <a:ln/>
         </p:spPr>
+        <p:txBody>
+          <a:bodyPr/>
+          <a:p/>
+        </p:txBody>
       </p:sp>
       <p:sp>
         <p:nvSpPr>
@@ -16066,7 +16358,7 @@
                 <a:ea typeface="Calibri" pitchFamily="34" charset="-122"/>
                 <a:cs typeface="Calibri" pitchFamily="34" charset="-120"/>
               </a:rPr>
-              <a:t>Relato: explicitar variáveis, relações e restrições.</a:t>
+              <a:t>Explicitar variáveis, relações e restrições.</a:t>
             </a:r>
             <a:endParaRPr lang="en-US" sz="1250" dirty="0"/>
           </a:p>
@@ -16087,7 +16379,7 @@
                 <a:ea typeface="Calibri" pitchFamily="34" charset="-122"/>
                 <a:cs typeface="Calibri" pitchFamily="34" charset="-120"/>
               </a:rPr>
-              <a:t>Queiroz: a tarefa deve articular dimensão material e cognitiva.</a:t>
+              <a:t>A tarefa deve articular dimensão material e cognitiva.</a:t>
             </a:r>
             <a:endParaRPr lang="en-US" sz="1250" dirty="0"/>
           </a:p>
@@ -16108,7 +16400,7 @@
                 <a:ea typeface="Calibri" pitchFamily="34" charset="-122"/>
                 <a:cs typeface="Calibri" pitchFamily="34" charset="-120"/>
               </a:rPr>
-              <a:t>Wessels: organizar dados é componente crítico da representação.</a:t>
+              <a:t>Organizar dados é componente crítico da representação.</a:t>
             </a:r>
             <a:endParaRPr lang="en-US" sz="1250" dirty="0"/>
           </a:p>
@@ -16135,6 +16427,10 @@
           </a:solidFill>
           <a:ln/>
         </p:spPr>
+        <p:txBody>
+          <a:bodyPr/>
+          <a:p/>
+        </p:txBody>
       </p:sp>
       <p:sp>
         <p:nvSpPr>
@@ -16402,6 +16698,10 @@
           </a:solidFill>
           <a:ln/>
         </p:spPr>
+        <p:txBody>
+          <a:bodyPr/>
+          <a:p/>
+        </p:txBody>
       </p:sp>
       <p:sp>
         <p:nvSpPr>
@@ -16502,6 +16802,10 @@
           </a:solidFill>
           <a:ln/>
         </p:spPr>
+        <p:txBody>
+          <a:bodyPr/>
+          <a:p/>
+        </p:txBody>
       </p:sp>
       <p:sp>
         <p:nvSpPr>
@@ -16669,6 +16973,10 @@
           </a:solidFill>
           <a:ln/>
         </p:spPr>
+        <p:txBody>
+          <a:bodyPr/>
+          <a:p/>
+        </p:txBody>
       </p:sp>
       <p:sp>
         <p:nvSpPr>
@@ -17388,6 +17696,10 @@
           </a:solidFill>
           <a:ln/>
         </p:spPr>
+        <p:txBody>
+          <a:bodyPr/>
+          <a:p/>
+        </p:txBody>
       </p:sp>
       <p:sp>
         <p:nvSpPr>
@@ -17486,7 +17798,7 @@
                 <a:ea typeface="Calibri" pitchFamily="34" charset="-122"/>
                 <a:cs typeface="Calibri" pitchFamily="34" charset="-120"/>
               </a:rPr>
-              <a:t>Wessels: níveis SOLO ajudam a observar respostas de menor a maior integração.</a:t>
+              <a:t>Níveis SOLO ajudam a observar respostas de menor a maior integração.</a:t>
             </a:r>
             <a:endParaRPr lang="en-US" sz="1250" dirty="0"/>
           </a:p>
@@ -17507,7 +17819,7 @@
                 <a:ea typeface="Calibri" pitchFamily="34" charset="-122"/>
                 <a:cs typeface="Calibri" pitchFamily="34" charset="-120"/>
               </a:rPr>
-              <a:t>Queiroz: representações ampliam a percepção de propriedades e relações.</a:t>
+              <a:t>Representações ampliam a percepção de propriedades e relações.</a:t>
             </a:r>
             <a:endParaRPr lang="en-US" sz="1250" dirty="0"/>
           </a:p>
@@ -17528,7 +17840,7 @@
                 <a:ea typeface="Calibri" pitchFamily="34" charset="-122"/>
                 <a:cs typeface="Calibri" pitchFamily="34" charset="-120"/>
               </a:rPr>
-              <a:t>Relato: articular código, texto, tabela, gráfico e interpretação.</a:t>
+              <a:t>Articular código, texto, tabela, gráfico e interpretação.</a:t>
             </a:r>
             <a:endParaRPr lang="en-US" sz="1250" dirty="0"/>
           </a:p>
@@ -17555,6 +17867,10 @@
           </a:solidFill>
           <a:ln/>
         </p:spPr>
+        <p:txBody>
+          <a:bodyPr/>
+          <a:p/>
+        </p:txBody>
       </p:sp>
       <p:sp>
         <p:nvSpPr>
@@ -17822,6 +18138,10 @@
           </a:solidFill>
           <a:ln/>
         </p:spPr>
+        <p:txBody>
+          <a:bodyPr/>
+          <a:p/>
+        </p:txBody>
       </p:sp>
       <p:sp>
         <p:nvSpPr>
@@ -17922,6 +18242,10 @@
           </a:solidFill>
           <a:ln/>
         </p:spPr>
+        <p:txBody>
+          <a:bodyPr/>
+          <a:p/>
+        </p:txBody>
       </p:sp>
       <p:sp>
         <p:nvSpPr>
@@ -18068,6 +18392,10 @@
           </a:solidFill>
           <a:ln/>
         </p:spPr>
+        <p:txBody>
+          <a:bodyPr/>
+          <a:p/>
+        </p:txBody>
       </p:sp>
       <p:sp>
         <p:nvSpPr>
@@ -18645,6 +18973,10 @@
           </a:solidFill>
           <a:ln/>
         </p:spPr>
+        <p:txBody>
+          <a:bodyPr/>
+          <a:p/>
+        </p:txBody>
       </p:sp>
       <p:sp>
         <p:nvSpPr>
@@ -18743,7 +19075,7 @@
                 <a:ea typeface="Calibri" pitchFamily="34" charset="-122"/>
                 <a:cs typeface="Calibri" pitchFamily="34" charset="-120"/>
               </a:rPr>
-              <a:t>Queiroz: feedback visual/textual deve orientar interpretação, não apenas corrigir.</a:t>
+              <a:t>Feedback visual/textual deve orientar interpretação, não apenas corrigir.</a:t>
             </a:r>
             <a:endParaRPr lang="en-US" sz="1250" dirty="0"/>
           </a:p>
@@ -18764,7 +19096,7 @@
                 <a:ea typeface="Calibri" pitchFamily="34" charset="-122"/>
                 <a:cs typeface="Calibri" pitchFamily="34" charset="-120"/>
               </a:rPr>
-              <a:t>Relato: solicitar explicação do raciocínio desenvolvido.</a:t>
+              <a:t>Solicitar explicação do raciocínio desenvolvido.</a:t>
             </a:r>
             <a:endParaRPr lang="en-US" sz="1250" dirty="0"/>
           </a:p>
@@ -18785,7 +19117,7 @@
                 <a:ea typeface="Calibri" pitchFamily="34" charset="-122"/>
                 <a:cs typeface="Calibri" pitchFamily="34" charset="-120"/>
               </a:rPr>
-              <a:t>Wessels: o contexto e o tipo de dado influenciam a representação escolhida.</a:t>
+              <a:t>O contexto e o tipo de dado influenciam a representação escolhida.</a:t>
             </a:r>
             <a:endParaRPr lang="en-US" sz="1250" dirty="0"/>
           </a:p>
@@ -18812,6 +19144,10 @@
           </a:solidFill>
           <a:ln/>
         </p:spPr>
+        <p:txBody>
+          <a:bodyPr/>
+          <a:p/>
+        </p:txBody>
       </p:sp>
       <p:sp>
         <p:nvSpPr>
